--- a/Smart_timetable_ppt.pptx
+++ b/Smart_timetable_ppt.pptx
@@ -5229,7 +5229,15 @@
             </a:r>
             <a:r>
               <a:rPr lang="en-IN" sz="2200" dirty="0"/>
-              <a:t>: (Subtext is too faint/low contrast to read clearly in the image)</a:t>
+              <a:t>: Smart formulas like nested if, </a:t>
+            </a:r>
+            <a:r>
+              <a:rPr lang="en-IN" sz="2200" dirty="0" err="1"/>
+              <a:t>countblank</a:t>
+            </a:r>
+            <a:r>
+              <a:rPr lang="en-IN" sz="2200" dirty="0"/>
+              <a:t> have been used.</a:t>
             </a:r>
           </a:p>
           <a:p>
@@ -5243,7 +5251,7 @@
             </a:r>
             <a:r>
               <a:rPr lang="en-IN" sz="2200" dirty="0"/>
-              <a:t>: (Subtext is too faint/low contrast to read clearly in the image)</a:t>
+              <a:t>: Data validation on Departments, Sections have been done.</a:t>
             </a:r>
           </a:p>
           <a:p>
